--- a/scratch/batch6_output.pptx
+++ b/scratch/batch6_output.pptx
@@ -3374,8 +3374,8 @@
         </p:nvCxnSpPr>
         <p:spPr>
           <a:xfrm>
-            <a:off x="914400" y="6451600"/>
-            <a:ext cx="12700" cy="12700"/>
+            <a:off x="889000" y="6273800"/>
+            <a:ext cx="508000" cy="12700"/>
           </a:xfrm>
           <a:prstGeom prst="line">
             <a:avLst/>
@@ -3387,72 +3387,9 @@
           </a:ln>
         </p:spPr>
       </p:cxnSp>
-      <p:cxnSp>
-        <p:nvCxnSpPr>
-          <p:cNvPr id="4" name="Line 4"/>
-          <p:cNvCxnSpPr/>
-          <p:nvPr/>
-        </p:nvCxnSpPr>
-        <p:spPr>
-          <a:xfrm>
-            <a:off x="787400" y="6527800"/>
-            <a:ext cx="12700" cy="12700"/>
-          </a:xfrm>
-          <a:prstGeom prst="line">
-            <a:avLst/>
-          </a:prstGeom>
-          <a:ln w="12700">
-            <a:solidFill>
-              <a:srgbClr val="1A1A1A"/>
-            </a:solidFill>
-          </a:ln>
-        </p:spPr>
-      </p:cxnSp>
-      <p:cxnSp>
-        <p:nvCxnSpPr>
-          <p:cNvPr id="5" name="Line 5"/>
-          <p:cNvCxnSpPr/>
-          <p:nvPr/>
-        </p:nvCxnSpPr>
-        <p:spPr>
-          <a:xfrm>
-            <a:off x="838200" y="6654800"/>
-            <a:ext cx="12700" cy="12700"/>
-          </a:xfrm>
-          <a:prstGeom prst="line">
-            <a:avLst/>
-          </a:prstGeom>
-          <a:ln w="12700">
-            <a:solidFill>
-              <a:srgbClr val="1A1A1A"/>
-            </a:solidFill>
-          </a:ln>
-        </p:spPr>
-      </p:cxnSp>
-      <p:cxnSp>
-        <p:nvCxnSpPr>
-          <p:cNvPr id="6" name="Line 6"/>
-          <p:cNvCxnSpPr/>
-          <p:nvPr/>
-        </p:nvCxnSpPr>
-        <p:spPr>
-          <a:xfrm>
-            <a:off x="889000" y="6273800"/>
-            <a:ext cx="12700" cy="12700"/>
-          </a:xfrm>
-          <a:prstGeom prst="line">
-            <a:avLst/>
-          </a:prstGeom>
-          <a:ln w="12700">
-            <a:solidFill>
-              <a:srgbClr val="1A1A1A"/>
-            </a:solidFill>
-          </a:ln>
-        </p:spPr>
-      </p:cxnSp>
-      <p:sp>
-        <p:nvSpPr>
-          <p:cNvPr id="7" name="Item 8" data-pipeline-marker="batch0_proven"/>
+      <p:sp>
+        <p:nvSpPr>
+          <p:cNvPr id="4" name="Item 5" data-pipeline-marker="batch0_proven"/>
           <p:cNvSpPr txBox="1"/>
           <p:nvPr/>
         </p:nvSpPr>
@@ -3485,14 +3422,14 @@
       </p:sp>
       <p:sp>
         <p:nvSpPr>
-          <p:cNvPr id="8" name="Item 9" data-pipeline-marker="batch0_proven"/>
+          <p:cNvPr id="5" name="Item 6" data-pipeline-marker="batch0_proven"/>
           <p:cNvSpPr txBox="1"/>
           <p:nvPr/>
         </p:nvSpPr>
         <p:spPr>
           <a:xfrm>
             <a:off x="508000" y="914400"/>
-            <a:ext cx="3670046" cy="215900"/>
+            <a:ext cx="3710940" cy="215900"/>
           </a:xfrm>
         </p:spPr>
         <p:txBody>
@@ -3518,7 +3455,7 @@
       </p:sp>
       <p:sp>
         <p:nvSpPr>
-          <p:cNvPr id="9" name="Item 10" data-pipeline-marker="batch0_proven"/>
+          <p:cNvPr id="6" name="Item 7" data-pipeline-marker="batch0_proven"/>
           <p:cNvSpPr txBox="1"/>
           <p:nvPr/>
         </p:nvSpPr>
@@ -3554,7 +3491,7 @@
       </p:sp>
       <p:sp>
         <p:nvSpPr>
-          <p:cNvPr id="10" name="Item 11" data-pipeline-marker="batch0_proven"/>
+          <p:cNvPr id="7" name="Item 8" data-pipeline-marker="batch0_proven"/>
           <p:cNvSpPr txBox="1"/>
           <p:nvPr/>
         </p:nvSpPr>
@@ -3598,7 +3535,7 @@
       </p:sp>
       <p:sp>
         <p:nvSpPr>
-          <p:cNvPr id="11" name="Item 12" data-pipeline-marker="batch0_proven"/>
+          <p:cNvPr id="8" name="Item 9" data-pipeline-marker="batch0_proven"/>
           <p:cNvSpPr txBox="1"/>
           <p:nvPr/>
         </p:nvSpPr>
@@ -3675,14 +3612,14 @@
       </p:sp>
       <p:sp>
         <p:nvSpPr>
-          <p:cNvPr id="12" name="Item 13" data-pipeline-marker="batch0_proven"/>
+          <p:cNvPr id="9" name="Item 10" data-pipeline-marker="batch0_proven"/>
           <p:cNvSpPr txBox="1"/>
           <p:nvPr/>
         </p:nvSpPr>
         <p:spPr>
           <a:xfrm>
             <a:off x="508000" y="4076700"/>
-            <a:ext cx="5109210" cy="165100"/>
+            <a:ext cx="5544617" cy="165100"/>
           </a:xfrm>
         </p:spPr>
         <p:txBody>
@@ -3708,14 +3645,14 @@
       </p:sp>
       <p:sp>
         <p:nvSpPr>
-          <p:cNvPr id="13" name="Item 14" data-pipeline-marker="batch0_proven"/>
+          <p:cNvPr id="10" name="Item 11" data-pipeline-marker="batch0_proven"/>
           <p:cNvSpPr txBox="1"/>
           <p:nvPr/>
         </p:nvSpPr>
         <p:spPr>
           <a:xfrm>
             <a:off x="508000" y="4305300"/>
-            <a:ext cx="4942408" cy="165100"/>
+            <a:ext cx="5494325" cy="165100"/>
           </a:xfrm>
         </p:spPr>
         <p:txBody>
@@ -3741,14 +3678,14 @@
       </p:sp>
       <p:sp>
         <p:nvSpPr>
-          <p:cNvPr id="14" name="Item 15" data-pipeline-marker="batch0_proven"/>
+          <p:cNvPr id="11" name="Item 12" data-pipeline-marker="batch0_proven"/>
           <p:cNvSpPr txBox="1"/>
           <p:nvPr/>
         </p:nvSpPr>
         <p:spPr>
           <a:xfrm>
             <a:off x="508000" y="4533900"/>
-            <a:ext cx="4984598" cy="165100"/>
+            <a:ext cx="5584850" cy="165100"/>
           </a:xfrm>
         </p:spPr>
         <p:txBody>
@@ -3774,14 +3711,14 @@
       </p:sp>
       <p:sp>
         <p:nvSpPr>
-          <p:cNvPr id="15" name="Item 16" data-pipeline-marker="batch0_proven"/>
+          <p:cNvPr id="12" name="Item 13" data-pipeline-marker="batch0_proven"/>
           <p:cNvSpPr txBox="1"/>
           <p:nvPr/>
         </p:nvSpPr>
         <p:spPr>
           <a:xfrm>
             <a:off x="508000" y="5029200"/>
-            <a:ext cx="3813353" cy="165100"/>
+            <a:ext cx="3844747" cy="165100"/>
           </a:xfrm>
         </p:spPr>
         <p:txBody>
@@ -3807,7 +3744,7 @@
       </p:sp>
       <p:sp>
         <p:nvSpPr>
-          <p:cNvPr id="16" name="Item 17" data-pipeline-marker="batch0_proven"/>
+          <p:cNvPr id="13" name="Item 14" data-pipeline-marker="batch0_proven"/>
           <p:cNvSpPr txBox="1"/>
           <p:nvPr/>
         </p:nvSpPr>
@@ -3840,14 +3777,14 @@
       </p:sp>
       <p:sp>
         <p:nvSpPr>
-          <p:cNvPr id="17" name="Item 18" data-pipeline-marker="batch0_proven"/>
+          <p:cNvPr id="14" name="Item 15" data-pipeline-marker="batch0_proven"/>
           <p:cNvSpPr txBox="1"/>
           <p:nvPr/>
         </p:nvSpPr>
         <p:spPr>
           <a:xfrm>
             <a:off x="508000" y="5867400"/>
-            <a:ext cx="2985135" cy="152400"/>
+            <a:ext cx="3160776" cy="152400"/>
           </a:xfrm>
         </p:spPr>
         <p:txBody>
@@ -3873,7 +3810,7 @@
       </p:sp>
       <p:sp>
         <p:nvSpPr>
-          <p:cNvPr id="18" name="Item 19" data-pipeline-marker="batch0_proven"/>
+          <p:cNvPr id="15" name="Item 16" data-pipeline-marker="batch0_proven"/>
           <p:cNvSpPr txBox="1"/>
           <p:nvPr/>
         </p:nvSpPr>
@@ -3891,7 +3828,7 @@
           <a:p>
             <a:pPr algn="l"/>
             <a:r>
-              <a:rPr lang="en-US" sz="1100" b="0" i="0">
+              <a:rPr lang="en-US" sz="1100" b="0" i="0" u="sng">
                 <a:solidFill>
                   <a:srgbClr val="1A1A1A"/>
                 </a:solidFill>
@@ -3906,14 +3843,14 @@
       </p:sp>
       <p:sp>
         <p:nvSpPr>
-          <p:cNvPr id="19" name="Item 20" data-pipeline-marker="batch0_proven"/>
+          <p:cNvPr id="16" name="Item 17" data-pipeline-marker="batch0_proven"/>
           <p:cNvSpPr txBox="1"/>
           <p:nvPr/>
         </p:nvSpPr>
         <p:spPr>
           <a:xfrm>
             <a:off x="508000" y="6324600"/>
-            <a:ext cx="412496" cy="177800"/>
+            <a:ext cx="456946" cy="177800"/>
           </a:xfrm>
         </p:spPr>
         <p:txBody>
@@ -3939,7 +3876,7 @@
       </p:sp>
       <p:sp>
         <p:nvSpPr>
-          <p:cNvPr id="20" name="Item 21" data-pipeline-marker="batch0_proven"/>
+          <p:cNvPr id="17" name="Item 18" data-pipeline-marker="batch0_proven"/>
           <p:cNvSpPr txBox="1"/>
           <p:nvPr/>
         </p:nvSpPr>
